--- a/esp32-class-projects/02_sessions/slides/5회차_팀프로젝트_기획.pptx
+++ b/esp32-class-projects/02_sessions/slides/5회차_팀프로젝트_기획.pptx
@@ -7251,7 +7251,7 @@
                           <a:ea typeface="Pretendard" pitchFamily="34" charset="-122"/>
                           <a:cs typeface="Pretendard" pitchFamily="34" charset="-120"/>
                         </a:rPr>
-                        <a:t>LCD·무게·진동</a:t>
+                        <a:t>7세그·무게·진동</a:t>
                       </a:r>
                       <a:endParaRPr lang="en-US" sz="1400" dirty="0">
                         <a:latin typeface="Pretendard" charset="0"/>
@@ -7525,7 +7525,7 @@
                           <a:ea typeface="Pretendard" pitchFamily="34" charset="-122"/>
                           <a:cs typeface="Pretendard" pitchFamily="34" charset="-120"/>
                         </a:rPr>
-                        <a:t>LCD(주문번호)·소리</a:t>
+                        <a:t>7세그(주문번호)·소리</a:t>
                       </a:r>
                       <a:endParaRPr lang="en-US" sz="1400" dirty="0">
                         <a:latin typeface="Pretendard" charset="0"/>
@@ -7799,7 +7799,7 @@
                           <a:ea typeface="Pretendard" pitchFamily="34" charset="-122"/>
                           <a:cs typeface="Pretendard" pitchFamily="34" charset="-120"/>
                         </a:rPr>
-                        <a:t>초음파·무게·LCD</a:t>
+                        <a:t>초음파·무게·7세그</a:t>
                       </a:r>
                       <a:endParaRPr lang="en-US" sz="1400" dirty="0">
                         <a:latin typeface="Pretendard" charset="0"/>
@@ -8005,7 +8005,7 @@
                           <a:ea typeface="Pretendard" pitchFamily="34" charset="-122"/>
                           <a:cs typeface="Pretendard" pitchFamily="34" charset="-120"/>
                         </a:rPr>
-                        <a:t>펌프 → 급수 알림(LCD·웹)</a:t>
+                        <a:t>펌프 → 급수 알림(웹·LED)</a:t>
                       </a:r>
                       <a:endParaRPr lang="en-US" sz="1400" dirty="0">
                         <a:latin typeface="Pretendard" charset="0"/>
@@ -8347,7 +8347,7 @@
                           <a:ea typeface="Pretendard" pitchFamily="34" charset="-122"/>
                           <a:cs typeface="Pretendard" pitchFamily="34" charset="-120"/>
                         </a:rPr>
-                        <a:t>홀(도어)·LCD</a:t>
+                        <a:t>홀(도어)·7세그</a:t>
                       </a:r>
                       <a:endParaRPr lang="en-US" sz="1400" dirty="0">
                         <a:latin typeface="Pretendard" charset="0"/>
@@ -9055,7 +9055,7 @@
                 <a:ea typeface="Pretendard" pitchFamily="34" charset="-122"/>
                 <a:cs typeface="Pretendard" pitchFamily="34" charset="-120"/>
               </a:rPr>
-              <a:t>예 : 주문 알림 → LCD(번호) + LED(깜빡임). 부품이 안 적힌 기능은 아직 설계가 아니에요</a:t>
+              <a:t>예 : 주문 알림 → 7세그(번호) + LED(깜빡임). 부품이 안 적힌 기능은 아직 설계가 아니에요</a:t>
             </a:r>
             <a:endParaRPr lang="en-US" sz="1500" dirty="0"/>
           </a:p>
